--- a/OrangeEnglish_Lesson6_TimedTask.pptx
+++ b/OrangeEnglish_Lesson6_TimedTask.pptx
@@ -2607,7 +2607,7 @@
                 <a:ea typeface="Inter" pitchFamily="34" charset="-122"/>
                 <a:cs typeface="Inter" pitchFamily="34" charset="-120"/>
               </a:rPr>
-              <a:t>Lesson 6 of 6 · IELTS Writing Task 1 · orangeenglish.nl</a:t>
+              <a:t>Lesson 6 of 8 · IELTS Writing Task 1 · orangeenglish.nl</a:t>
             </a:r>
             <a:endParaRPr lang="en-US" sz="1800" dirty="0"/>
           </a:p>
@@ -3436,7 +3436,7 @@
                 <a:ea typeface="Inter" pitchFamily="34" charset="-122"/>
                 <a:cs typeface="Inter" pitchFamily="34" charset="-120"/>
               </a:rPr>
-              <a:t>Lesson 6 of 6 · IELTS Writing Task 1 · orangeenglish.nl</a:t>
+              <a:t>Lesson 6 of 8 · IELTS Writing Task 1 · orangeenglish.nl</a:t>
             </a:r>
             <a:endParaRPr lang="en-US" sz="1800" dirty="0"/>
           </a:p>
@@ -4322,7 +4322,7 @@
                 <a:ea typeface="Inter" pitchFamily="34" charset="-122"/>
                 <a:cs typeface="Inter" pitchFamily="34" charset="-120"/>
               </a:rPr>
-              <a:t>Lesson 6 of 6 · IELTS Writing Task 1 · orangeenglish.nl</a:t>
+              <a:t>Lesson 6 of 8 · IELTS Writing Task 1 · orangeenglish.nl</a:t>
             </a:r>
             <a:endParaRPr lang="en-US" sz="1800" dirty="0"/>
           </a:p>
@@ -5156,7 +5156,7 @@
                 <a:ea typeface="Inter" pitchFamily="34" charset="-122"/>
                 <a:cs typeface="Inter" pitchFamily="34" charset="-120"/>
               </a:rPr>
-              <a:t>Lesson 6 of 6 · IELTS Writing Task 1 · orangeenglish.nl</a:t>
+              <a:t>Lesson 6 of 8 · IELTS Writing Task 1 · orangeenglish.nl</a:t>
             </a:r>
             <a:endParaRPr lang="en-US" sz="1800" dirty="0"/>
           </a:p>
@@ -6195,7 +6195,7 @@
                 <a:ea typeface="Inter" pitchFamily="34" charset="-122"/>
                 <a:cs typeface="Inter" pitchFamily="34" charset="-120"/>
               </a:rPr>
-              <a:t>Lesson 6 of 6 · IELTS Writing Task 1 · orangeenglish.nl</a:t>
+              <a:t>Lesson 6 of 8 · IELTS Writing Task 1 · orangeenglish.nl</a:t>
             </a:r>
             <a:endParaRPr lang="en-US" sz="1800" dirty="0"/>
           </a:p>
@@ -6920,7 +6920,7 @@
                 <a:ea typeface="Inter" pitchFamily="34" charset="-122"/>
                 <a:cs typeface="Inter" pitchFamily="34" charset="-120"/>
               </a:rPr>
-              <a:t>Lesson 6 of 6 · IELTS Writing Task 1 · orangeenglish.nl</a:t>
+              <a:t>Lesson 6 of 8 · IELTS Writing Task 1 · orangeenglish.nl</a:t>
             </a:r>
             <a:endParaRPr lang="en-US" sz="1800" dirty="0"/>
           </a:p>
@@ -7447,7 +7447,7 @@
                 <a:ea typeface="Inter" pitchFamily="34" charset="-122"/>
                 <a:cs typeface="Inter" pitchFamily="34" charset="-120"/>
               </a:rPr>
-              <a:t>Lesson 6 of 6 · IELTS Writing Task 1 · orangeenglish.nl</a:t>
+              <a:t>Lesson 6 of 8 · IELTS Writing Task 1 · orangeenglish.nl</a:t>
             </a:r>
             <a:endParaRPr lang="en-US" sz="1800" dirty="0"/>
           </a:p>
@@ -8248,7 +8248,7 @@
                 <a:ea typeface="Inter" pitchFamily="34" charset="-122"/>
                 <a:cs typeface="Inter" pitchFamily="34" charset="-120"/>
               </a:rPr>
-              <a:t>Lesson 6 of 6 · Orange English, Line Graph Success, complete.</a:t>
+              <a:t>Lesson 6 of 8 · Orange English, Line Graph Success, complete.</a:t>
             </a:r>
             <a:endParaRPr lang="en-US" sz="1800" dirty="0"/>
           </a:p>

--- a/OrangeEnglish_Lesson6_TimedTask.pptx
+++ b/OrangeEnglish_Lesson6_TimedTask.pptx
@@ -1599,6 +1599,10 @@
           </a:solidFill>
           <a:ln/>
         </p:spPr>
+        <p:txBody>
+          <a:bodyPr/>
+          <a:p/>
+        </p:txBody>
       </p:sp>
       <p:pic>
         <p:nvPicPr>
@@ -1968,6 +1972,10 @@
           </a:solidFill>
           <a:ln/>
         </p:spPr>
+        <p:txBody>
+          <a:bodyPr/>
+          <a:p/>
+        </p:txBody>
       </p:sp>
       <p:pic>
         <p:nvPicPr>
@@ -2607,7 +2615,7 @@
                 <a:ea typeface="Inter" pitchFamily="34" charset="-122"/>
                 <a:cs typeface="Inter" pitchFamily="34" charset="-120"/>
               </a:rPr>
-              <a:t>Lesson 6 of 8 · IELTS Writing Task 1 · orangeenglish.nl</a:t>
+              <a:t>Lesson 6 of 6 · IELTS Writing Task 1 · orangeenglish.nl</a:t>
             </a:r>
             <a:endParaRPr lang="en-US" sz="1800" dirty="0"/>
           </a:p>
@@ -2698,6 +2706,10 @@
           </a:solidFill>
           <a:ln/>
         </p:spPr>
+        <p:txBody>
+          <a:bodyPr/>
+          <a:p/>
+        </p:txBody>
       </p:sp>
       <p:pic>
         <p:nvPicPr>
@@ -2856,6 +2868,10 @@
             <a:prstDash val="solid"/>
           </a:ln>
         </p:spPr>
+        <p:txBody>
+          <a:bodyPr/>
+          <a:p/>
+        </p:txBody>
       </p:sp>
       <p:sp>
         <p:nvSpPr>
@@ -2878,6 +2894,10 @@
           </a:solidFill>
           <a:ln/>
         </p:spPr>
+        <p:txBody>
+          <a:bodyPr/>
+          <a:p/>
+        </p:txBody>
       </p:sp>
       <p:sp>
         <p:nvSpPr>
@@ -2898,6 +2918,10 @@
           </a:solidFill>
           <a:ln/>
         </p:spPr>
+        <p:txBody>
+          <a:bodyPr/>
+          <a:p/>
+        </p:txBody>
       </p:sp>
       <p:sp>
         <p:nvSpPr>
@@ -3025,6 +3049,10 @@
           </a:solidFill>
           <a:ln/>
         </p:spPr>
+        <p:txBody>
+          <a:bodyPr/>
+          <a:p/>
+        </p:txBody>
       </p:sp>
       <p:sp>
         <p:nvSpPr>
@@ -3045,6 +3073,10 @@
           </a:solidFill>
           <a:ln/>
         </p:spPr>
+        <p:txBody>
+          <a:bodyPr/>
+          <a:p/>
+        </p:txBody>
       </p:sp>
       <p:sp>
         <p:nvSpPr>
@@ -3172,6 +3204,10 @@
           </a:solidFill>
           <a:ln/>
         </p:spPr>
+        <p:txBody>
+          <a:bodyPr/>
+          <a:p/>
+        </p:txBody>
       </p:sp>
       <p:sp>
         <p:nvSpPr>
@@ -3436,7 +3472,7 @@
                 <a:ea typeface="Inter" pitchFamily="34" charset="-122"/>
                 <a:cs typeface="Inter" pitchFamily="34" charset="-120"/>
               </a:rPr>
-              <a:t>Lesson 6 of 8 · IELTS Writing Task 1 · orangeenglish.nl</a:t>
+              <a:t>Lesson 6 of 6 · IELTS Writing Task 1 · orangeenglish.nl</a:t>
             </a:r>
             <a:endParaRPr lang="en-US" sz="1800" dirty="0"/>
           </a:p>
@@ -3527,6 +3563,10 @@
           </a:solidFill>
           <a:ln/>
         </p:spPr>
+        <p:txBody>
+          <a:bodyPr/>
+          <a:p/>
+        </p:txBody>
       </p:sp>
       <p:pic>
         <p:nvPicPr>
@@ -3768,7 +3808,7 @@
                 <a:ea typeface="Montserrat" pitchFamily="34" charset="-122"/>
                 <a:cs typeface="Montserrat" pitchFamily="34" charset="-120"/>
               </a:rPr>
-              <a:t>, not a word less.</a:t>
+              <a:t>, as a minimum.</a:t>
             </a:r>
             <a:endParaRPr lang="en-US" sz="4200" dirty="0"/>
           </a:p>
@@ -3812,7 +3852,7 @@
                 <a:ea typeface="Inter" pitchFamily="34" charset="-122"/>
                 <a:cs typeface="Inter" pitchFamily="34" charset="-120"/>
               </a:rPr>
-              <a:t>Underlength answers are penalised </a:t>
+              <a:t>A short answer may not cover the key features fully. </a:t>
             </a:r>
             <a:pPr algn="l" indent="0" marL="0">
               <a:lnSpc>
@@ -3829,7 +3869,7 @@
                 <a:ea typeface="Inter" pitchFamily="34" charset="-122"/>
                 <a:cs typeface="Inter" pitchFamily="34" charset="-120"/>
               </a:rPr>
-              <a:t>regardless of quality. Rough paragraph guide:</a:t>
+              <a:t>Rough paragraph guide (155+ words in total):</a:t>
             </a:r>
             <a:endParaRPr lang="en-US" sz="2400" dirty="0"/>
           </a:p>
@@ -3865,6 +3905,10 @@
             <a:prstDash val="solid"/>
           </a:ln>
         </p:spPr>
+        <p:txBody>
+          <a:bodyPr/>
+          <a:p/>
+        </p:txBody>
       </p:sp>
       <p:sp>
         <p:nvSpPr>
@@ -3978,6 +4022,10 @@
             <a:prstDash val="solid"/>
           </a:ln>
         </p:spPr>
+        <p:txBody>
+          <a:bodyPr/>
+          <a:p/>
+        </p:txBody>
       </p:sp>
       <p:sp>
         <p:nvSpPr>
@@ -4091,6 +4139,10 @@
             <a:prstDash val="solid"/>
           </a:ln>
         </p:spPr>
+        <p:txBody>
+          <a:bodyPr/>
+          <a:p/>
+        </p:txBody>
       </p:sp>
       <p:sp>
         <p:nvSpPr>
@@ -4168,7 +4220,7 @@
                 <a:ea typeface="Caveat" pitchFamily="34" charset="-122"/>
                 <a:cs typeface="Caveat" pitchFamily="34" charset="-120"/>
               </a:rPr>
-              <a:t>40–50 words</a:t>
+              <a:t>50–60 words</a:t>
             </a:r>
             <a:endParaRPr lang="en-US" sz="3150" dirty="0"/>
           </a:p>
@@ -4204,6 +4256,10 @@
             <a:prstDash val="solid"/>
           </a:ln>
         </p:spPr>
+        <p:txBody>
+          <a:bodyPr/>
+          <a:p/>
+        </p:txBody>
       </p:sp>
       <p:sp>
         <p:nvSpPr>
@@ -4281,7 +4337,7 @@
                 <a:ea typeface="Caveat" pitchFamily="34" charset="-122"/>
                 <a:cs typeface="Caveat" pitchFamily="34" charset="-120"/>
               </a:rPr>
-              <a:t>40–50 words</a:t>
+              <a:t>50–60 words</a:t>
             </a:r>
             <a:endParaRPr lang="en-US" sz="3150" dirty="0"/>
           </a:p>
@@ -4322,7 +4378,7 @@
                 <a:ea typeface="Inter" pitchFamily="34" charset="-122"/>
                 <a:cs typeface="Inter" pitchFamily="34" charset="-120"/>
               </a:rPr>
-              <a:t>Lesson 6 of 8 · IELTS Writing Task 1 · orangeenglish.nl</a:t>
+              <a:t>Lesson 6 of 6 · IELTS Writing Task 1 · orangeenglish.nl</a:t>
             </a:r>
             <a:endParaRPr lang="en-US" sz="1800" dirty="0"/>
           </a:p>
@@ -4413,6 +4469,10 @@
           </a:solidFill>
           <a:ln/>
         </p:spPr>
+        <p:txBody>
+          <a:bodyPr/>
+          <a:p/>
+        </p:txBody>
       </p:sp>
       <p:pic>
         <p:nvPicPr>
@@ -4576,6 +4636,10 @@
             <a:prstDash val="solid"/>
           </a:ln>
         </p:spPr>
+        <p:txBody>
+          <a:bodyPr/>
+          <a:p/>
+        </p:txBody>
       </p:sp>
       <p:sp>
         <p:nvSpPr>
@@ -4809,6 +4873,10 @@
             <a:prstDash val="solid"/>
           </a:ln>
         </p:spPr>
+        <p:txBody>
+          <a:bodyPr/>
+          <a:p/>
+        </p:txBody>
       </p:sp>
       <p:sp>
         <p:nvSpPr>
@@ -4998,6 +5066,10 @@
             <a:prstDash val="solid"/>
           </a:ln>
         </p:spPr>
+        <p:txBody>
+          <a:bodyPr/>
+          <a:p/>
+        </p:txBody>
       </p:sp>
       <p:sp>
         <p:nvSpPr>
@@ -5115,7 +5187,7 @@
                 <a:ea typeface="Inter" pitchFamily="34" charset="-122"/>
                 <a:cs typeface="Inter" pitchFamily="34" charset="-120"/>
               </a:rPr>
-              <a:t>for checking, even if it means cutting a sentence short.</a:t>
+              <a:t>for checking: finish your sentence, don't start a new detail.</a:t>
             </a:r>
             <a:endParaRPr lang="en-US" sz="2400" dirty="0"/>
           </a:p>
@@ -5156,7 +5228,7 @@
                 <a:ea typeface="Inter" pitchFamily="34" charset="-122"/>
                 <a:cs typeface="Inter" pitchFamily="34" charset="-120"/>
               </a:rPr>
-              <a:t>Lesson 6 of 8 · IELTS Writing Task 1 · orangeenglish.nl</a:t>
+              <a:t>Lesson 6 of 6 · IELTS Writing Task 1 · orangeenglish.nl</a:t>
             </a:r>
             <a:endParaRPr lang="en-US" sz="1800" dirty="0"/>
           </a:p>
@@ -5247,6 +5319,10 @@
           </a:solidFill>
           <a:ln/>
         </p:spPr>
+        <p:txBody>
+          <a:bodyPr/>
+          <a:p/>
+        </p:txBody>
       </p:sp>
       <p:pic>
         <p:nvPicPr>
@@ -5374,7 +5450,7 @@
                 <a:ea typeface="Montserrat" pitchFamily="34" charset="-122"/>
                 <a:cs typeface="Montserrat" pitchFamily="34" charset="-120"/>
               </a:rPr>
-              <a:t>Score yourself against all four criteria.</a:t>
+              <a:t>Review your answer against the four criteria.</a:t>
             </a:r>
             <a:endParaRPr lang="en-US" sz="4200" dirty="0"/>
           </a:p>
@@ -5403,6 +5479,10 @@
           </a:solidFill>
           <a:ln/>
         </p:spPr>
+        <p:txBody>
+          <a:bodyPr/>
+          <a:p/>
+        </p:txBody>
       </p:sp>
       <p:sp>
         <p:nvSpPr>
@@ -5425,6 +5505,10 @@
           </a:solidFill>
           <a:ln/>
         </p:spPr>
+        <p:txBody>
+          <a:bodyPr/>
+          <a:p/>
+        </p:txBody>
       </p:sp>
       <p:sp>
         <p:nvSpPr>
@@ -5447,6 +5531,10 @@
           </a:solidFill>
           <a:ln/>
         </p:spPr>
+        <p:txBody>
+          <a:bodyPr/>
+          <a:p/>
+        </p:txBody>
       </p:sp>
       <p:sp>
         <p:nvSpPr>
@@ -5467,6 +5555,10 @@
           </a:solidFill>
           <a:ln/>
         </p:spPr>
+        <p:txBody>
+          <a:bodyPr/>
+          <a:p/>
+        </p:txBody>
       </p:sp>
       <p:sp>
         <p:nvSpPr>
@@ -5489,6 +5581,10 @@
           </a:solidFill>
           <a:ln/>
         </p:spPr>
+        <p:txBody>
+          <a:bodyPr/>
+          <a:p/>
+        </p:txBody>
       </p:sp>
       <p:sp>
         <p:nvSpPr>
@@ -5598,6 +5694,10 @@
           </a:solidFill>
           <a:ln/>
         </p:spPr>
+        <p:txBody>
+          <a:bodyPr/>
+          <a:p/>
+        </p:txBody>
       </p:sp>
       <p:sp>
         <p:nvSpPr>
@@ -5620,6 +5720,10 @@
           </a:solidFill>
           <a:ln/>
         </p:spPr>
+        <p:txBody>
+          <a:bodyPr/>
+          <a:p/>
+        </p:txBody>
       </p:sp>
       <p:sp>
         <p:nvSpPr>
@@ -5642,6 +5746,10 @@
           </a:solidFill>
           <a:ln/>
         </p:spPr>
+        <p:txBody>
+          <a:bodyPr/>
+          <a:p/>
+        </p:txBody>
       </p:sp>
       <p:sp>
         <p:nvSpPr>
@@ -5662,6 +5770,10 @@
           </a:solidFill>
           <a:ln/>
         </p:spPr>
+        <p:txBody>
+          <a:bodyPr/>
+          <a:p/>
+        </p:txBody>
       </p:sp>
       <p:sp>
         <p:nvSpPr>
@@ -5684,6 +5796,10 @@
           </a:solidFill>
           <a:ln/>
         </p:spPr>
+        <p:txBody>
+          <a:bodyPr/>
+          <a:p/>
+        </p:txBody>
       </p:sp>
       <p:sp>
         <p:nvSpPr>
@@ -5764,7 +5880,7 @@
                 <a:ea typeface="Inter" pitchFamily="34" charset="-122"/>
                 <a:cs typeface="Inter" pitchFamily="34" charset="-120"/>
               </a:rPr>
-              <a:t>Clear four-part structure, linking words used.</a:t>
+              <a:t>Clear paragraphs, connections that make sense.</a:t>
             </a:r>
             <a:endParaRPr lang="en-US" sz="2100" dirty="0"/>
           </a:p>
@@ -5793,6 +5909,10 @@
           </a:solidFill>
           <a:ln/>
         </p:spPr>
+        <p:txBody>
+          <a:bodyPr/>
+          <a:p/>
+        </p:txBody>
       </p:sp>
       <p:sp>
         <p:nvSpPr>
@@ -5815,6 +5935,10 @@
           </a:solidFill>
           <a:ln/>
         </p:spPr>
+        <p:txBody>
+          <a:bodyPr/>
+          <a:p/>
+        </p:txBody>
       </p:sp>
       <p:sp>
         <p:nvSpPr>
@@ -5837,6 +5961,10 @@
           </a:solidFill>
           <a:ln/>
         </p:spPr>
+        <p:txBody>
+          <a:bodyPr/>
+          <a:p/>
+        </p:txBody>
       </p:sp>
       <p:sp>
         <p:nvSpPr>
@@ -5857,6 +5985,10 @@
           </a:solidFill>
           <a:ln/>
         </p:spPr>
+        <p:txBody>
+          <a:bodyPr/>
+          <a:p/>
+        </p:txBody>
       </p:sp>
       <p:sp>
         <p:nvSpPr>
@@ -5879,6 +6011,10 @@
           </a:solidFill>
           <a:ln/>
         </p:spPr>
+        <p:txBody>
+          <a:bodyPr/>
+          <a:p/>
+        </p:txBody>
       </p:sp>
       <p:sp>
         <p:nvSpPr>
@@ -5959,7 +6095,7 @@
                 <a:ea typeface="Inter" pitchFamily="34" charset="-122"/>
                 <a:cs typeface="Inter" pitchFamily="34" charset="-120"/>
               </a:rPr>
-              <a:t>Varied verbs and adverbs, no repetition.</a:t>
+              <a:t>Precise words, with a range where it helps.</a:t>
             </a:r>
             <a:endParaRPr lang="en-US" sz="2100" dirty="0"/>
           </a:p>
@@ -5988,6 +6124,10 @@
           </a:solidFill>
           <a:ln/>
         </p:spPr>
+        <p:txBody>
+          <a:bodyPr/>
+          <a:p/>
+        </p:txBody>
       </p:sp>
       <p:sp>
         <p:nvSpPr>
@@ -6010,6 +6150,10 @@
           </a:solidFill>
           <a:ln/>
         </p:spPr>
+        <p:txBody>
+          <a:bodyPr/>
+          <a:p/>
+        </p:txBody>
       </p:sp>
       <p:sp>
         <p:nvSpPr>
@@ -6032,6 +6176,10 @@
           </a:solidFill>
           <a:ln/>
         </p:spPr>
+        <p:txBody>
+          <a:bodyPr/>
+          <a:p/>
+        </p:txBody>
       </p:sp>
       <p:sp>
         <p:nvSpPr>
@@ -6052,6 +6200,10 @@
           </a:solidFill>
           <a:ln/>
         </p:spPr>
+        <p:txBody>
+          <a:bodyPr/>
+          <a:p/>
+        </p:txBody>
       </p:sp>
       <p:sp>
         <p:nvSpPr>
@@ -6074,6 +6226,10 @@
           </a:solidFill>
           <a:ln/>
         </p:spPr>
+        <p:txBody>
+          <a:bodyPr/>
+          <a:p/>
+        </p:txBody>
       </p:sp>
       <p:sp>
         <p:nvSpPr>
@@ -6154,7 +6310,7 @@
                 <a:ea typeface="Inter" pitchFamily="34" charset="-122"/>
                 <a:cs typeface="Inter" pitchFamily="34" charset="-120"/>
               </a:rPr>
-              <a:t>Consistent tense, correct comparatives.</a:t>
+              <a:t>Tense matches the time reference, correct comparatives.</a:t>
             </a:r>
             <a:endParaRPr lang="en-US" sz="2100" dirty="0"/>
           </a:p>
@@ -6195,7 +6351,7 @@
                 <a:ea typeface="Inter" pitchFamily="34" charset="-122"/>
                 <a:cs typeface="Inter" pitchFamily="34" charset="-120"/>
               </a:rPr>
-              <a:t>Lesson 6 of 8 · IELTS Writing Task 1 · orangeenglish.nl</a:t>
+              <a:t>Lesson 6 of 6 · IELTS Writing Task 1 · orangeenglish.nl</a:t>
             </a:r>
             <a:endParaRPr lang="en-US" sz="1800" dirty="0"/>
           </a:p>
@@ -6286,6 +6442,10 @@
           </a:solidFill>
           <a:ln/>
         </p:spPr>
+        <p:txBody>
+          <a:bodyPr/>
+          <a:p/>
+        </p:txBody>
       </p:sp>
       <p:pic>
         <p:nvPicPr>
@@ -6449,6 +6609,10 @@
             <a:prstDash val="solid"/>
           </a:ln>
         </p:spPr>
+        <p:txBody>
+          <a:bodyPr/>
+          <a:p/>
+        </p:txBody>
       </p:sp>
       <p:sp>
         <p:nvSpPr>
@@ -6647,6 +6811,10 @@
             <a:prstDash val="solid"/>
           </a:ln>
         </p:spPr>
+        <p:txBody>
+          <a:bodyPr/>
+          <a:p/>
+        </p:txBody>
       </p:sp>
       <p:sp>
         <p:nvSpPr>
@@ -6730,32 +6898,6 @@
           </a:p>
         </p:txBody>
       </p:sp>
-      <p:pic>
-        <p:nvPicPr>
-          <p:cNvPr id="15" name="Image 2" descr="preencoded.png">    </p:cNvPr>
-          <p:cNvPicPr>
-            <a:picLocks noChangeAspect="1"/>
-          </p:cNvPicPr>
-          <p:nvPr/>
-        </p:nvPicPr>
-        <p:blipFill>
-          <a:blip r:embed="rId3">
-            <a:alphaModFix amt="95000"/>
-          </a:blip>
-          <a:stretch>
-            <a:fillRect/>
-          </a:stretch>
-        </p:blipFill>
-        <p:spPr>
-          <a:xfrm>
-            <a:off x="1590675" y="6157615"/>
-            <a:ext cx="5842471" cy="502444"/>
-          </a:xfrm>
-          <a:prstGeom prst="rect">
-            <a:avLst/>
-          </a:prstGeom>
-        </p:spPr>
-      </p:pic>
       <p:sp>
         <p:nvSpPr>
           <p:cNvPr id="16" name="Text 11"/>
@@ -6765,16 +6907,16 @@
         <p:spPr>
           <a:xfrm>
             <a:off x="1666875" y="6195715"/>
-            <a:ext cx="6259078" cy="442913"/>
-          </a:xfrm>
-          <a:prstGeom prst="rect">
-            <a:avLst/>
-          </a:prstGeom>
-          <a:noFill/>
-          <a:ln/>
-        </p:spPr>
-        <p:txBody>
-          <a:bodyPr wrap="none" lIns="25400" tIns="25400" rIns="25400" bIns="25400" rtlCol="0" anchor="t">
+            <a:ext cx="14418737" cy="926306"/>
+          </a:xfrm>
+          <a:prstGeom prst="rect">
+            <a:avLst/>
+          </a:prstGeom>
+          <a:noFill/>
+          <a:ln/>
+        </p:spPr>
+        <p:txBody>
+          <a:bodyPr wrap="square" lIns="25400" tIns="25400" rIns="25400" bIns="25400" rtlCol="0" anchor="t">
             <a:normAutofit/>
           </a:bodyPr>
           <a:lstStyle/>
@@ -6797,38 +6939,6 @@
               <a:t>Complete four-paragraph response</a:t>
             </a:r>
             <a:endParaRPr lang="en-US" sz="2625" dirty="0"/>
-          </a:p>
-        </p:txBody>
-      </p:sp>
-      <p:sp>
-        <p:nvSpPr>
-          <p:cNvPr id="17" name="Text 12"/>
-          <p:cNvSpPr/>
-          <p:nvPr/>
-        </p:nvSpPr>
-        <p:spPr>
-          <a:xfrm>
-            <a:off x="1666875" y="6195715"/>
-            <a:ext cx="14418737" cy="926306"/>
-          </a:xfrm>
-          <a:prstGeom prst="rect">
-            <a:avLst/>
-          </a:prstGeom>
-          <a:noFill/>
-          <a:ln/>
-        </p:spPr>
-        <p:txBody>
-          <a:bodyPr wrap="square" lIns="0" tIns="0" rIns="0" bIns="0" rtlCol="0" anchor="t">
-            <a:normAutofit/>
-          </a:bodyPr>
-          <a:lstStyle/>
-          <a:p>
-            <a:pPr algn="l" indent="0" marL="0">
-              <a:lnSpc>
-                <a:spcPct val="145000"/>
-              </a:lnSpc>
-              <a:buNone/>
-            </a:pPr>
             <a:r>
               <a:rPr lang="en-US" sz="2625" dirty="0">
                 <a:solidFill>
@@ -6840,7 +6950,6 @@
               </a:rPr>
               <a:t>, overview included, 165 words, finished with time to spare.</a:t>
             </a:r>
-            <a:endParaRPr lang="en-US" sz="2625" dirty="0"/>
           </a:p>
         </p:txBody>
       </p:sp>
@@ -6920,7 +7029,7 @@
                 <a:ea typeface="Inter" pitchFamily="34" charset="-122"/>
                 <a:cs typeface="Inter" pitchFamily="34" charset="-120"/>
               </a:rPr>
-              <a:t>Lesson 6 of 8 · IELTS Writing Task 1 · orangeenglish.nl</a:t>
+              <a:t>Lesson 6 of 6 · IELTS Writing Task 1 · orangeenglish.nl</a:t>
             </a:r>
             <a:endParaRPr lang="en-US" sz="1800" dirty="0"/>
           </a:p>
@@ -7011,6 +7120,10 @@
           </a:solidFill>
           <a:ln/>
         </p:spPr>
+        <p:txBody>
+          <a:bodyPr/>
+          <a:p/>
+        </p:txBody>
       </p:sp>
       <p:pic>
         <p:nvPicPr>
@@ -7260,7 +7373,7 @@
                 <a:ea typeface="Inter" pitchFamily="34" charset="-122"/>
                 <a:cs typeface="Inter" pitchFamily="34" charset="-120"/>
               </a:rPr>
-              <a:t>and your self-editing checklist.</a:t>
+              <a:t>and your self-review checklist.</a:t>
             </a:r>
             <a:endParaRPr lang="en-US" sz="2475" dirty="0"/>
           </a:p>
@@ -7296,6 +7409,10 @@
             <a:prstDash val="solid"/>
           </a:ln>
         </p:spPr>
+        <p:txBody>
+          <a:bodyPr/>
+          <a:p/>
+        </p:txBody>
       </p:sp>
       <p:pic>
         <p:nvPicPr>
@@ -7447,7 +7564,7 @@
                 <a:ea typeface="Inter" pitchFamily="34" charset="-122"/>
                 <a:cs typeface="Inter" pitchFamily="34" charset="-120"/>
               </a:rPr>
-              <a:t>Lesson 6 of 8 · IELTS Writing Task 1 · orangeenglish.nl</a:t>
+              <a:t>Lesson 6 of 6 · IELTS Writing Task 1 · orangeenglish.nl</a:t>
             </a:r>
             <a:endParaRPr lang="en-US" sz="1800" dirty="0"/>
           </a:p>
@@ -7538,6 +7655,10 @@
           </a:solidFill>
           <a:ln/>
         </p:spPr>
+        <p:txBody>
+          <a:bodyPr/>
+          <a:p/>
+        </p:txBody>
       </p:sp>
       <p:pic>
         <p:nvPicPr>
@@ -7693,6 +7814,10 @@
           </a:solidFill>
           <a:ln/>
         </p:spPr>
+        <p:txBody>
+          <a:bodyPr/>
+          <a:p/>
+        </p:txBody>
       </p:sp>
       <p:sp>
         <p:nvSpPr>
@@ -7815,6 +7940,10 @@
           </a:solidFill>
           <a:ln/>
         </p:spPr>
+        <p:txBody>
+          <a:bodyPr/>
+          <a:p/>
+        </p:txBody>
       </p:sp>
       <p:sp>
         <p:nvSpPr>
@@ -7954,6 +8083,10 @@
           </a:solidFill>
           <a:ln/>
         </p:spPr>
+        <p:txBody>
+          <a:bodyPr/>
+          <a:p/>
+        </p:txBody>
       </p:sp>
       <p:sp>
         <p:nvSpPr>
@@ -8093,6 +8226,10 @@
           </a:solidFill>
           <a:ln/>
         </p:spPr>
+        <p:txBody>
+          <a:bodyPr/>
+          <a:p/>
+        </p:txBody>
       </p:sp>
       <p:sp>
         <p:nvSpPr>
@@ -8248,7 +8385,7 @@
                 <a:ea typeface="Inter" pitchFamily="34" charset="-122"/>
                 <a:cs typeface="Inter" pitchFamily="34" charset="-120"/>
               </a:rPr>
-              <a:t>Lesson 6 of 8 · Orange English, Line Graph Success, complete.</a:t>
+              <a:t>Lesson 6 of 6 · Orange English, Line Graph Success, complete.</a:t>
             </a:r>
             <a:endParaRPr lang="en-US" sz="1800" dirty="0"/>
           </a:p>
